--- a/deck/Echo-Loop_Idea_Deck.pptx
+++ b/deck/Echo-Loop_Idea_Deck.pptx
@@ -4833,7 +4833,7 @@
                 </a:solidFill>
                 <a:latin typeface="Segoe UI"/>
               </a:rPr>
-              <a:t>TITLE PAGE</a:t>
+              <a:t>AUTONOMOUS BUILDING ENERGY MANAGEMENT</a:t>
             </a:r>
           </a:p>
         </p:txBody>
@@ -5280,11 +5280,11 @@
             <a:r>
               <a:rPr sz="1150" b="1">
                 <a:solidFill>
-                  <a:srgbClr val="F59E0B"/>
+                  <a:srgbClr val="F1F5F9"/>
                 </a:solidFill>
                 <a:latin typeface="Segoe UI"/>
               </a:rPr>
-              <a:t>Problem Statement ID  &lt;&lt;FILL IN&gt;&gt;      ·      Theme  &lt;&lt;FILL IN&gt;&gt;</a:t>
+              <a:t>Problem Statement ID  1      ·      Theme  Clean &amp; Green Technology</a:t>
             </a:r>
           </a:p>
           <a:p>
@@ -5301,7 +5301,7 @@
                 </a:solidFill>
                 <a:latin typeface="Segoe UI"/>
               </a:rPr>
-              <a:t>PS Category  Software      ·      Student  Ayush Yadav      ·      Student ID  &lt;&lt;FILL IN&gt;&gt;</a:t>
+              <a:t>PS Category  Software      ·      Student  Ayush Yadav      ·      Student ID  23BAI10006</a:t>
             </a:r>
           </a:p>
         </p:txBody>
@@ -6551,7 +6551,7 @@
                 </a:solidFill>
                 <a:latin typeface="Segoe UI"/>
               </a:rPr>
-              <a:t>IDEA TITLE</a:t>
+              <a:t>PROPOSED SOLUTION &amp; INNOVATION</a:t>
             </a:r>
           </a:p>
         </p:txBody>

--- a/deck/Echo-Loop_Idea_Deck.pptx
+++ b/deck/Echo-Loop_Idea_Deck.pptx
@@ -4670,7 +4670,7 @@
     <p:bg>
       <p:bgPr>
         <a:solidFill>
-          <a:srgbClr val="0E1626"/>
+          <a:srgbClr val="FFFFFF"/>
         </a:solidFill>
         <a:effectLst/>
       </p:bgPr>
@@ -4706,7 +4706,7 @@
             </a:avLst>
           </a:prstGeom>
           <a:solidFill>
-            <a:srgbClr val="16213A"/>
+            <a:srgbClr val="F1F5F9"/>
           </a:solidFill>
           <a:ln>
             <a:noFill/>
@@ -4759,7 +4759,7 @@
             <a:r>
               <a:rPr sz="1000" b="1">
                 <a:solidFill>
-                  <a:srgbClr val="93A7BD"/>
+                  <a:srgbClr val="5A6B80"/>
                 </a:solidFill>
                 <a:latin typeface="Segoe UI"/>
               </a:rPr>
@@ -4794,7 +4794,7 @@
             <a:r>
               <a:rPr sz="1000" b="1">
                 <a:solidFill>
-                  <a:srgbClr val="22E88A"/>
+                  <a:srgbClr val="0A7A52"/>
                 </a:solidFill>
                 <a:latin typeface="Segoe UI"/>
               </a:rPr>
@@ -4829,7 +4829,7 @@
             <a:r>
               <a:rPr sz="1000" b="1">
                 <a:solidFill>
-                  <a:srgbClr val="22E88A"/>
+                  <a:srgbClr val="0A7A52"/>
                 </a:solidFill>
                 <a:latin typeface="Segoe UI"/>
               </a:rPr>
@@ -4869,7 +4869,7 @@
             <a:r>
               <a:rPr sz="2700" b="0">
                 <a:solidFill>
-                  <a:srgbClr val="FFFFFF"/>
+                  <a:srgbClr val="0B1220"/>
                 </a:solidFill>
                 <a:latin typeface="Segoe UI Semibold"/>
               </a:rPr>
@@ -4909,7 +4909,7 @@
             <a:r>
               <a:rPr sz="1150" b="1">
                 <a:solidFill>
-                  <a:srgbClr val="CBD5E1"/>
+                  <a:srgbClr val="33455C"/>
                 </a:solidFill>
                 <a:latin typeface="Segoe UI"/>
               </a:rPr>
@@ -4949,7 +4949,7 @@
             <a:r>
               <a:rPr sz="1250" b="0">
                 <a:solidFill>
-                  <a:srgbClr val="F1F5F9"/>
+                  <a:srgbClr val="0F1B2D"/>
                 </a:solidFill>
                 <a:latin typeface="Segoe UI"/>
               </a:rPr>
@@ -4989,7 +4989,7 @@
             <a:r>
               <a:rPr sz="4000" b="0">
                 <a:solidFill>
-                  <a:srgbClr val="22E88A"/>
+                  <a:srgbClr val="0A7A52"/>
                 </a:solidFill>
                 <a:latin typeface="Segoe UI Semibold"/>
               </a:rPr>
@@ -5029,7 +5029,7 @@
             <a:r>
               <a:rPr sz="1300" b="0">
                 <a:solidFill>
-                  <a:srgbClr val="F1F5F9"/>
+                  <a:srgbClr val="0F1B2D"/>
                 </a:solidFill>
                 <a:latin typeface="Segoe UI Semibold"/>
               </a:rPr>
@@ -5046,7 +5046,7 @@
             <a:r>
               <a:rPr sz="1100" b="0">
                 <a:solidFill>
-                  <a:srgbClr val="93A7BD"/>
+                  <a:srgbClr val="5A6B80"/>
                 </a:solidFill>
                 <a:latin typeface="Segoe UI"/>
               </a:rPr>
@@ -5086,7 +5086,7 @@
             <a:r>
               <a:rPr sz="3600" b="0">
                 <a:solidFill>
-                  <a:srgbClr val="60A5FA"/>
+                  <a:srgbClr val="2563EB"/>
                 </a:solidFill>
                 <a:latin typeface="Segoe UI Semibold"/>
               </a:rPr>
@@ -5126,7 +5126,7 @@
             <a:r>
               <a:rPr sz="1300" b="0">
                 <a:solidFill>
-                  <a:srgbClr val="F1F5F9"/>
+                  <a:srgbClr val="0F1B2D"/>
                 </a:solidFill>
                 <a:latin typeface="Segoe UI Semibold"/>
               </a:rPr>
@@ -5143,7 +5143,7 @@
             <a:r>
               <a:rPr sz="1100" b="0">
                 <a:solidFill>
-                  <a:srgbClr val="93A7BD"/>
+                  <a:srgbClr val="5A6B80"/>
                 </a:solidFill>
                 <a:latin typeface="Segoe UI"/>
               </a:rPr>
@@ -5183,7 +5183,7 @@
             <a:r>
               <a:rPr sz="4000" b="0">
                 <a:solidFill>
-                  <a:srgbClr val="22E88A"/>
+                  <a:srgbClr val="0A7A52"/>
                 </a:solidFill>
                 <a:latin typeface="Segoe UI Semibold"/>
               </a:rPr>
@@ -5223,7 +5223,7 @@
             <a:r>
               <a:rPr sz="1300" b="0">
                 <a:solidFill>
-                  <a:srgbClr val="F1F5F9"/>
+                  <a:srgbClr val="0F1B2D"/>
                 </a:solidFill>
                 <a:latin typeface="Segoe UI Semibold"/>
               </a:rPr>
@@ -5240,7 +5240,7 @@
             <a:r>
               <a:rPr sz="1100" b="0">
                 <a:solidFill>
-                  <a:srgbClr val="93A7BD"/>
+                  <a:srgbClr val="5A6B80"/>
                 </a:solidFill>
                 <a:latin typeface="Segoe UI"/>
               </a:rPr>
@@ -5280,7 +5280,7 @@
             <a:r>
               <a:rPr sz="1150" b="1">
                 <a:solidFill>
-                  <a:srgbClr val="F1F5F9"/>
+                  <a:srgbClr val="0F1B2D"/>
                 </a:solidFill>
                 <a:latin typeface="Segoe UI"/>
               </a:rPr>
@@ -5297,7 +5297,7 @@
             <a:r>
               <a:rPr sz="1150" b="0">
                 <a:solidFill>
-                  <a:srgbClr val="CBD5E1"/>
+                  <a:srgbClr val="33455C"/>
                 </a:solidFill>
                 <a:latin typeface="Segoe UI"/>
               </a:rPr>
@@ -5334,7 +5334,7 @@
             <a:r>
               <a:rPr sz="1100">
                 <a:solidFill>
-                  <a:srgbClr val="93A7BD"/>
+                  <a:srgbClr val="5A6B80"/>
                 </a:solidFill>
                 <a:latin typeface="Segoe UI"/>
               </a:rPr>
@@ -5343,7 +5343,7 @@
             <a:r>
               <a:rPr sz="1100" b="0">
                 <a:solidFill>
-                  <a:srgbClr val="60A5FA"/>
+                  <a:srgbClr val="2563EB"/>
                 </a:solidFill>
                 <a:latin typeface="Segoe UI"/>
                 <a:hlinkClick r:id="rId2"/>
@@ -5358,7 +5358,7 @@
             <a:r>
               <a:rPr sz="1100">
                 <a:solidFill>
-                  <a:srgbClr val="93A7BD"/>
+                  <a:srgbClr val="5A6B80"/>
                 </a:solidFill>
                 <a:latin typeface="Segoe UI"/>
               </a:rPr>
@@ -5367,7 +5367,7 @@
             <a:r>
               <a:rPr sz="1100" b="0">
                 <a:solidFill>
-                  <a:srgbClr val="60A5FA"/>
+                  <a:srgbClr val="2563EB"/>
                 </a:solidFill>
                 <a:latin typeface="Segoe UI"/>
                 <a:hlinkClick r:id="rId3"/>
@@ -5394,7 +5394,7 @@
             </a:avLst>
           </a:prstGeom>
           <a:solidFill>
-            <a:srgbClr val="1B2845"/>
+            <a:srgbClr val="E8EFF7"/>
           </a:solidFill>
           <a:ln>
             <a:noFill/>
@@ -5423,7 +5423,7 @@
             <a:r>
               <a:rPr sz="900" b="1">
                 <a:solidFill>
-                  <a:srgbClr val="60A5FA"/>
+                  <a:srgbClr val="2563EB"/>
                 </a:solidFill>
                 <a:latin typeface="Segoe UI"/>
               </a:rPr>
@@ -5463,7 +5463,7 @@
             <a:r>
               <a:rPr sz="1200" b="0">
                 <a:solidFill>
-                  <a:srgbClr val="93A7BD"/>
+                  <a:srgbClr val="5A6B80"/>
                 </a:solidFill>
                 <a:latin typeface="Segoe UI"/>
               </a:rPr>
@@ -5489,7 +5489,7 @@
             </a:avLst>
           </a:prstGeom>
           <a:solidFill>
-            <a:srgbClr val="1B2845"/>
+            <a:srgbClr val="E8EFF7"/>
           </a:solidFill>
           <a:ln>
             <a:noFill/>
@@ -5518,7 +5518,7 @@
             <a:r>
               <a:rPr sz="900" b="1">
                 <a:solidFill>
-                  <a:srgbClr val="60A5FA"/>
+                  <a:srgbClr val="2563EB"/>
                 </a:solidFill>
                 <a:latin typeface="Segoe UI"/>
               </a:rPr>
@@ -5558,7 +5558,7 @@
             <a:r>
               <a:rPr sz="1200" b="0">
                 <a:solidFill>
-                  <a:srgbClr val="93A7BD"/>
+                  <a:srgbClr val="5A6B80"/>
                 </a:solidFill>
                 <a:latin typeface="Segoe UI"/>
               </a:rPr>
@@ -5584,7 +5584,7 @@
             </a:avLst>
           </a:prstGeom>
           <a:solidFill>
-            <a:srgbClr val="1B2845"/>
+            <a:srgbClr val="E8EFF7"/>
           </a:solidFill>
           <a:ln>
             <a:noFill/>
@@ -5613,7 +5613,7 @@
             <a:r>
               <a:rPr sz="900" b="1">
                 <a:solidFill>
-                  <a:srgbClr val="22E88A"/>
+                  <a:srgbClr val="0A7A52"/>
                 </a:solidFill>
                 <a:latin typeface="Segoe UI"/>
               </a:rPr>
@@ -5653,7 +5653,7 @@
             <a:r>
               <a:rPr sz="1200" b="0">
                 <a:solidFill>
-                  <a:srgbClr val="93A7BD"/>
+                  <a:srgbClr val="5A6B80"/>
                 </a:solidFill>
                 <a:latin typeface="Segoe UI"/>
               </a:rPr>
@@ -5679,7 +5679,7 @@
             </a:avLst>
           </a:prstGeom>
           <a:solidFill>
-            <a:srgbClr val="1B2845"/>
+            <a:srgbClr val="E8EFF7"/>
           </a:solidFill>
           <a:ln>
             <a:noFill/>
@@ -5708,7 +5708,7 @@
             <a:r>
               <a:rPr sz="900" b="1">
                 <a:solidFill>
-                  <a:srgbClr val="F59E0B"/>
+                  <a:srgbClr val="C2410C"/>
                 </a:solidFill>
                 <a:latin typeface="Segoe UI"/>
               </a:rPr>
@@ -5748,7 +5748,7 @@
             <a:r>
               <a:rPr sz="1200" b="0">
                 <a:solidFill>
-                  <a:srgbClr val="93A7BD"/>
+                  <a:srgbClr val="5A6B80"/>
                 </a:solidFill>
                 <a:latin typeface="Segoe UI"/>
               </a:rPr>
@@ -5774,7 +5774,7 @@
             </a:avLst>
           </a:prstGeom>
           <a:solidFill>
-            <a:srgbClr val="1B2845"/>
+            <a:srgbClr val="E8EFF7"/>
           </a:solidFill>
           <a:ln>
             <a:noFill/>
@@ -5803,7 +5803,7 @@
             <a:r>
               <a:rPr sz="900" b="1">
                 <a:solidFill>
-                  <a:srgbClr val="60A5FA"/>
+                  <a:srgbClr val="2563EB"/>
                 </a:solidFill>
                 <a:latin typeface="Segoe UI"/>
               </a:rPr>
@@ -5843,7 +5843,7 @@
             <a:r>
               <a:rPr sz="1050" b="0">
                 <a:solidFill>
-                  <a:srgbClr val="93A7BD"/>
+                  <a:srgbClr val="5A6B80"/>
                 </a:solidFill>
                 <a:latin typeface="Segoe UI"/>
               </a:rPr>
@@ -5869,7 +5869,7 @@
             </a:avLst>
           </a:prstGeom>
           <a:solidFill>
-            <a:srgbClr val="1B2845"/>
+            <a:srgbClr val="E8EFF7"/>
           </a:solidFill>
           <a:ln>
             <a:noFill/>
@@ -5898,7 +5898,7 @@
             <a:r>
               <a:rPr sz="900" b="1">
                 <a:solidFill>
-                  <a:srgbClr val="93A7BD"/>
+                  <a:srgbClr val="5A6B80"/>
                 </a:solidFill>
                 <a:latin typeface="Segoe UI"/>
               </a:rPr>
@@ -5924,7 +5924,7 @@
             </a:avLst>
           </a:prstGeom>
           <a:solidFill>
-            <a:srgbClr val="1B2845"/>
+            <a:srgbClr val="E8EFF7"/>
           </a:solidFill>
           <a:ln>
             <a:noFill/>
@@ -5953,7 +5953,7 @@
             <a:r>
               <a:rPr sz="900" b="1">
                 <a:solidFill>
-                  <a:srgbClr val="93A7BD"/>
+                  <a:srgbClr val="5A6B80"/>
                 </a:solidFill>
                 <a:latin typeface="Segoe UI"/>
               </a:rPr>
@@ -5979,7 +5979,7 @@
             </a:avLst>
           </a:prstGeom>
           <a:solidFill>
-            <a:srgbClr val="1B2845"/>
+            <a:srgbClr val="E8EFF7"/>
           </a:solidFill>
           <a:ln>
             <a:noFill/>
@@ -6008,7 +6008,7 @@
             <a:r>
               <a:rPr sz="900" b="1">
                 <a:solidFill>
-                  <a:srgbClr val="93A7BD"/>
+                  <a:srgbClr val="5A6B80"/>
                 </a:solidFill>
                 <a:latin typeface="Segoe UI"/>
               </a:rPr>
@@ -6034,7 +6034,7 @@
             </a:avLst>
           </a:prstGeom>
           <a:solidFill>
-            <a:srgbClr val="1B2845"/>
+            <a:srgbClr val="E8EFF7"/>
           </a:solidFill>
           <a:ln>
             <a:noFill/>
@@ -6063,7 +6063,7 @@
             <a:r>
               <a:rPr sz="900" b="1">
                 <a:solidFill>
-                  <a:srgbClr val="93A7BD"/>
+                  <a:srgbClr val="5A6B80"/>
                 </a:solidFill>
                 <a:latin typeface="Segoe UI"/>
               </a:rPr>
@@ -6089,7 +6089,7 @@
             </a:avLst>
           </a:prstGeom>
           <a:solidFill>
-            <a:srgbClr val="1B2845"/>
+            <a:srgbClr val="E8EFF7"/>
           </a:solidFill>
           <a:ln>
             <a:noFill/>
@@ -6118,7 +6118,7 @@
             <a:r>
               <a:rPr sz="900" b="1">
                 <a:solidFill>
-                  <a:srgbClr val="93A7BD"/>
+                  <a:srgbClr val="5A6B80"/>
                 </a:solidFill>
                 <a:latin typeface="Segoe UI"/>
               </a:rPr>
@@ -6144,7 +6144,7 @@
             </a:avLst>
           </a:prstGeom>
           <a:solidFill>
-            <a:srgbClr val="1B2845"/>
+            <a:srgbClr val="E8EFF7"/>
           </a:solidFill>
           <a:ln>
             <a:noFill/>
@@ -6173,7 +6173,7 @@
             <a:r>
               <a:rPr sz="900" b="1">
                 <a:solidFill>
-                  <a:srgbClr val="93A7BD"/>
+                  <a:srgbClr val="5A6B80"/>
                 </a:solidFill>
                 <a:latin typeface="Segoe UI"/>
               </a:rPr>
@@ -6199,7 +6199,7 @@
             </a:avLst>
           </a:prstGeom>
           <a:solidFill>
-            <a:srgbClr val="1B2845"/>
+            <a:srgbClr val="E8EFF7"/>
           </a:solidFill>
           <a:ln>
             <a:noFill/>
@@ -6228,7 +6228,7 @@
             <a:r>
               <a:rPr sz="900" b="1">
                 <a:solidFill>
-                  <a:srgbClr val="93A7BD"/>
+                  <a:srgbClr val="5A6B80"/>
                 </a:solidFill>
                 <a:latin typeface="Segoe UI"/>
               </a:rPr>
@@ -6256,7 +6256,7 @@
     <p:bg>
       <p:bgPr>
         <a:solidFill>
-          <a:srgbClr val="0E1626"/>
+          <a:srgbClr val="FFFFFF"/>
         </a:solidFill>
         <a:effectLst/>
       </p:bgPr>
@@ -6292,7 +6292,7 @@
             </a:avLst>
           </a:prstGeom>
           <a:solidFill>
-            <a:srgbClr val="16213A"/>
+            <a:srgbClr val="F1F5F9"/>
           </a:solidFill>
           <a:ln>
             <a:noFill/>
@@ -6336,7 +6336,7 @@
             </a:avLst>
           </a:prstGeom>
           <a:solidFill>
-            <a:srgbClr val="16213A"/>
+            <a:srgbClr val="F1F5F9"/>
           </a:solidFill>
           <a:ln>
             <a:noFill/>
@@ -6380,7 +6380,7 @@
             </a:avLst>
           </a:prstGeom>
           <a:solidFill>
-            <a:srgbClr val="16213A"/>
+            <a:srgbClr val="F1F5F9"/>
           </a:solidFill>
           <a:ln>
             <a:noFill/>
@@ -6424,7 +6424,7 @@
             </a:avLst>
           </a:prstGeom>
           <a:solidFill>
-            <a:srgbClr val="1B2845"/>
+            <a:srgbClr val="E8EFF7"/>
           </a:solidFill>
           <a:ln>
             <a:noFill/>
@@ -6477,7 +6477,7 @@
             <a:r>
               <a:rPr sz="1000" b="1">
                 <a:solidFill>
-                  <a:srgbClr val="93A7BD"/>
+                  <a:srgbClr val="5A6B80"/>
                 </a:solidFill>
                 <a:latin typeface="Segoe UI"/>
               </a:rPr>
@@ -6512,7 +6512,7 @@
             <a:r>
               <a:rPr sz="1000" b="1">
                 <a:solidFill>
-                  <a:srgbClr val="22E88A"/>
+                  <a:srgbClr val="0A7A52"/>
                 </a:solidFill>
                 <a:latin typeface="Segoe UI"/>
               </a:rPr>
@@ -6547,7 +6547,7 @@
             <a:r>
               <a:rPr sz="1000" b="1">
                 <a:solidFill>
-                  <a:srgbClr val="22E88A"/>
+                  <a:srgbClr val="0A7A52"/>
                 </a:solidFill>
                 <a:latin typeface="Segoe UI"/>
               </a:rPr>
@@ -6587,7 +6587,7 @@
             <a:r>
               <a:rPr sz="2700" b="0">
                 <a:solidFill>
-                  <a:srgbClr val="FFFFFF"/>
+                  <a:srgbClr val="0B1220"/>
                 </a:solidFill>
                 <a:latin typeface="Segoe UI Semibold"/>
               </a:rPr>
@@ -6627,7 +6627,7 @@
             <a:r>
               <a:rPr sz="1150" b="1">
                 <a:solidFill>
-                  <a:srgbClr val="CBD5E1"/>
+                  <a:srgbClr val="33455C"/>
                 </a:solidFill>
                 <a:latin typeface="Segoe UI"/>
               </a:rPr>
@@ -6667,7 +6667,7 @@
             <a:r>
               <a:rPr sz="1300" b="0">
                 <a:solidFill>
-                  <a:srgbClr val="FFFFFF"/>
+                  <a:srgbClr val="0B1220"/>
                 </a:solidFill>
                 <a:latin typeface="Segoe UI Semibold"/>
               </a:rPr>
@@ -6708,7 +6708,7 @@
             <a:r>
               <a:rPr sz="1150" b="0">
                 <a:solidFill>
-                  <a:srgbClr val="CBD5E1"/>
+                  <a:srgbClr val="33455C"/>
                 </a:solidFill>
                 <a:latin typeface="Segoe UI"/>
               </a:rPr>
@@ -6726,7 +6726,7 @@
             <a:r>
               <a:rPr sz="1150" b="0">
                 <a:solidFill>
-                  <a:srgbClr val="CBD5E1"/>
+                  <a:srgbClr val="33455C"/>
                 </a:solidFill>
                 <a:latin typeface="Segoe UI"/>
               </a:rPr>
@@ -6744,7 +6744,7 @@
             <a:r>
               <a:rPr sz="1150" b="0">
                 <a:solidFill>
-                  <a:srgbClr val="CBD5E1"/>
+                  <a:srgbClr val="33455C"/>
                 </a:solidFill>
                 <a:latin typeface="Segoe UI"/>
               </a:rPr>
@@ -6784,7 +6784,7 @@
             <a:r>
               <a:rPr sz="1300" b="0">
                 <a:solidFill>
-                  <a:srgbClr val="FFFFFF"/>
+                  <a:srgbClr val="0B1220"/>
                 </a:solidFill>
                 <a:latin typeface="Segoe UI Semibold"/>
               </a:rPr>
@@ -6824,7 +6824,7 @@
             <a:r>
               <a:rPr sz="1150" b="0">
                 <a:solidFill>
-                  <a:srgbClr val="CBD5E1"/>
+                  <a:srgbClr val="33455C"/>
                 </a:solidFill>
                 <a:latin typeface="Segoe UI"/>
               </a:rPr>
@@ -6888,7 +6888,7 @@
             <a:r>
               <a:rPr sz="900" b="1">
                 <a:solidFill>
-                  <a:srgbClr val="93A7BD"/>
+                  <a:srgbClr val="5A6B80"/>
                 </a:solidFill>
                 <a:latin typeface="Segoe UI"/>
               </a:rPr>
@@ -6905,7 +6905,7 @@
             <a:r>
               <a:rPr sz="1050" b="0">
                 <a:solidFill>
-                  <a:srgbClr val="60A5FA"/>
+                  <a:srgbClr val="2563EB"/>
                 </a:solidFill>
                 <a:latin typeface="Consolas"/>
               </a:rPr>
@@ -6922,7 +6922,7 @@
             <a:r>
               <a:rPr sz="1050" b="0">
                 <a:solidFill>
-                  <a:srgbClr val="22E88A"/>
+                  <a:srgbClr val="0A7A52"/>
                 </a:solidFill>
                 <a:latin typeface="Consolas"/>
               </a:rPr>
@@ -6962,7 +6962,7 @@
             <a:r>
               <a:rPr sz="1250" b="0">
                 <a:solidFill>
-                  <a:srgbClr val="60A5FA"/>
+                  <a:srgbClr val="2563EB"/>
                 </a:solidFill>
                 <a:latin typeface="Segoe UI Semibold"/>
               </a:rPr>
@@ -6979,7 +6979,7 @@
             <a:r>
               <a:rPr sz="1100" b="0">
                 <a:solidFill>
-                  <a:srgbClr val="CBD5E1"/>
+                  <a:srgbClr val="33455C"/>
                 </a:solidFill>
                 <a:latin typeface="Segoe UI"/>
               </a:rPr>
@@ -6996,7 +6996,7 @@
             <a:r>
               <a:rPr sz="1000" b="0">
                 <a:solidFill>
-                  <a:srgbClr val="93A7BD"/>
+                  <a:srgbClr val="5A6B80"/>
                 </a:solidFill>
                 <a:latin typeface="Segoe UI"/>
               </a:rPr>
@@ -7036,7 +7036,7 @@
             <a:r>
               <a:rPr sz="1250" b="0">
                 <a:solidFill>
-                  <a:srgbClr val="F59E0B"/>
+                  <a:srgbClr val="C2410C"/>
                 </a:solidFill>
                 <a:latin typeface="Segoe UI Semibold"/>
               </a:rPr>
@@ -7053,7 +7053,7 @@
             <a:r>
               <a:rPr sz="1100" b="0">
                 <a:solidFill>
-                  <a:srgbClr val="CBD5E1"/>
+                  <a:srgbClr val="33455C"/>
                 </a:solidFill>
                 <a:latin typeface="Segoe UI"/>
               </a:rPr>
@@ -7070,7 +7070,7 @@
             <a:r>
               <a:rPr sz="1000" b="0">
                 <a:solidFill>
-                  <a:srgbClr val="93A7BD"/>
+                  <a:srgbClr val="5A6B80"/>
                 </a:solidFill>
                 <a:latin typeface="Segoe UI"/>
               </a:rPr>
@@ -7110,7 +7110,7 @@
             <a:r>
               <a:rPr sz="1250" b="0">
                 <a:solidFill>
-                  <a:srgbClr val="22E88A"/>
+                  <a:srgbClr val="0A7A52"/>
                 </a:solidFill>
                 <a:latin typeface="Segoe UI Semibold"/>
               </a:rPr>
@@ -7127,7 +7127,7 @@
             <a:r>
               <a:rPr sz="1100" b="0">
                 <a:solidFill>
-                  <a:srgbClr val="CBD5E1"/>
+                  <a:srgbClr val="33455C"/>
                 </a:solidFill>
                 <a:latin typeface="Segoe UI"/>
               </a:rPr>
@@ -7144,7 +7144,7 @@
             <a:r>
               <a:rPr sz="1000" b="0">
                 <a:solidFill>
-                  <a:srgbClr val="93A7BD"/>
+                  <a:srgbClr val="5A6B80"/>
                 </a:solidFill>
                 <a:latin typeface="Segoe UI"/>
               </a:rPr>
@@ -7167,7 +7167,7 @@
     <p:bg>
       <p:bgPr>
         <a:solidFill>
-          <a:srgbClr val="0E1626"/>
+          <a:srgbClr val="FFFFFF"/>
         </a:solidFill>
         <a:effectLst/>
       </p:bgPr>
@@ -7212,7 +7212,7 @@
             <a:r>
               <a:rPr sz="1000" b="1">
                 <a:solidFill>
-                  <a:srgbClr val="93A7BD"/>
+                  <a:srgbClr val="5A6B80"/>
                 </a:solidFill>
                 <a:latin typeface="Segoe UI"/>
               </a:rPr>
@@ -7247,7 +7247,7 @@
             <a:r>
               <a:rPr sz="1000" b="1">
                 <a:solidFill>
-                  <a:srgbClr val="22E88A"/>
+                  <a:srgbClr val="0A7A52"/>
                 </a:solidFill>
                 <a:latin typeface="Segoe UI"/>
               </a:rPr>
@@ -7282,7 +7282,7 @@
             <a:r>
               <a:rPr sz="1000" b="1">
                 <a:solidFill>
-                  <a:srgbClr val="22E88A"/>
+                  <a:srgbClr val="0A7A52"/>
                 </a:solidFill>
                 <a:latin typeface="Segoe UI"/>
               </a:rPr>
@@ -7322,7 +7322,7 @@
             <a:r>
               <a:rPr sz="2700" b="0">
                 <a:solidFill>
-                  <a:srgbClr val="FFFFFF"/>
+                  <a:srgbClr val="0B1220"/>
                 </a:solidFill>
                 <a:latin typeface="Segoe UI Semibold"/>
               </a:rPr>
@@ -7410,7 +7410,7 @@
             <a:r>
               <a:rPr sz="1100" b="0">
                 <a:solidFill>
-                  <a:srgbClr val="93A7BD"/>
+                  <a:srgbClr val="5A6B80"/>
                 </a:solidFill>
                 <a:latin typeface="Segoe UI"/>
               </a:rPr>
@@ -7433,7 +7433,7 @@
     <p:bg>
       <p:bgPr>
         <a:solidFill>
-          <a:srgbClr val="0E1626"/>
+          <a:srgbClr val="FFFFFF"/>
         </a:solidFill>
         <a:effectLst/>
       </p:bgPr>
@@ -7478,7 +7478,7 @@
             <a:r>
               <a:rPr sz="1000" b="1">
                 <a:solidFill>
-                  <a:srgbClr val="93A7BD"/>
+                  <a:srgbClr val="5A6B80"/>
                 </a:solidFill>
                 <a:latin typeface="Segoe UI"/>
               </a:rPr>
@@ -7513,7 +7513,7 @@
             <a:r>
               <a:rPr sz="1000" b="1">
                 <a:solidFill>
-                  <a:srgbClr val="22E88A"/>
+                  <a:srgbClr val="0A7A52"/>
                 </a:solidFill>
                 <a:latin typeface="Segoe UI"/>
               </a:rPr>
@@ -7548,7 +7548,7 @@
             <a:r>
               <a:rPr sz="1000" b="1">
                 <a:solidFill>
-                  <a:srgbClr val="22E88A"/>
+                  <a:srgbClr val="0A7A52"/>
                 </a:solidFill>
                 <a:latin typeface="Segoe UI"/>
               </a:rPr>
@@ -7588,7 +7588,7 @@
             <a:r>
               <a:rPr sz="2700" b="0">
                 <a:solidFill>
-                  <a:srgbClr val="FFFFFF"/>
+                  <a:srgbClr val="0B1220"/>
                 </a:solidFill>
                 <a:latin typeface="Segoe UI Semibold"/>
               </a:rPr>
@@ -7628,7 +7628,7 @@
             <a:r>
               <a:rPr sz="3400" b="0">
                 <a:solidFill>
-                  <a:srgbClr val="22E88A"/>
+                  <a:srgbClr val="0A7A52"/>
                 </a:solidFill>
                 <a:latin typeface="Segoe UI Semibold"/>
               </a:rPr>
@@ -7668,7 +7668,7 @@
             <a:r>
               <a:rPr sz="1300" b="0">
                 <a:solidFill>
-                  <a:srgbClr val="F1F5F9"/>
+                  <a:srgbClr val="0F1B2D"/>
                 </a:solidFill>
                 <a:latin typeface="Segoe UI Semibold"/>
               </a:rPr>
@@ -7685,7 +7685,7 @@
             <a:r>
               <a:rPr sz="1100" b="0">
                 <a:solidFill>
-                  <a:srgbClr val="93A7BD"/>
+                  <a:srgbClr val="5A6B80"/>
                 </a:solidFill>
                 <a:latin typeface="Segoe UI"/>
               </a:rPr>
@@ -7725,7 +7725,7 @@
             <a:r>
               <a:rPr sz="3400" b="0">
                 <a:solidFill>
-                  <a:srgbClr val="22E88A"/>
+                  <a:srgbClr val="0A7A52"/>
                 </a:solidFill>
                 <a:latin typeface="Segoe UI Semibold"/>
               </a:rPr>
@@ -7765,7 +7765,7 @@
             <a:r>
               <a:rPr sz="1300" b="0">
                 <a:solidFill>
-                  <a:srgbClr val="F1F5F9"/>
+                  <a:srgbClr val="0F1B2D"/>
                 </a:solidFill>
                 <a:latin typeface="Segoe UI Semibold"/>
               </a:rPr>
@@ -7782,7 +7782,7 @@
             <a:r>
               <a:rPr sz="1100" b="0">
                 <a:solidFill>
-                  <a:srgbClr val="93A7BD"/>
+                  <a:srgbClr val="5A6B80"/>
                 </a:solidFill>
                 <a:latin typeface="Segoe UI"/>
               </a:rPr>
@@ -7822,7 +7822,7 @@
             <a:r>
               <a:rPr sz="3400" b="0">
                 <a:solidFill>
-                  <a:srgbClr val="60A5FA"/>
+                  <a:srgbClr val="2563EB"/>
                 </a:solidFill>
                 <a:latin typeface="Segoe UI Semibold"/>
               </a:rPr>
@@ -7862,7 +7862,7 @@
             <a:r>
               <a:rPr sz="1300" b="0">
                 <a:solidFill>
-                  <a:srgbClr val="F1F5F9"/>
+                  <a:srgbClr val="0F1B2D"/>
                 </a:solidFill>
                 <a:latin typeface="Segoe UI Semibold"/>
               </a:rPr>
@@ -7879,7 +7879,7 @@
             <a:r>
               <a:rPr sz="1100" b="0">
                 <a:solidFill>
-                  <a:srgbClr val="93A7BD"/>
+                  <a:srgbClr val="5A6B80"/>
                 </a:solidFill>
                 <a:latin typeface="Segoe UI"/>
               </a:rPr>
@@ -7919,7 +7919,7 @@
             <a:r>
               <a:rPr sz="1300" b="0">
                 <a:solidFill>
-                  <a:srgbClr val="F59E0B"/>
+                  <a:srgbClr val="C2410C"/>
                 </a:solidFill>
                 <a:latin typeface="Segoe UI Semibold"/>
               </a:rPr>
@@ -7960,7 +7960,7 @@
             <a:r>
               <a:rPr sz="1150" b="0">
                 <a:solidFill>
-                  <a:srgbClr val="CBD5E1"/>
+                  <a:srgbClr val="33455C"/>
                 </a:solidFill>
                 <a:latin typeface="Segoe UI"/>
               </a:rPr>
@@ -7978,7 +7978,7 @@
             <a:r>
               <a:rPr sz="1150" b="0">
                 <a:solidFill>
-                  <a:srgbClr val="CBD5E1"/>
+                  <a:srgbClr val="33455C"/>
                 </a:solidFill>
                 <a:latin typeface="Segoe UI"/>
               </a:rPr>
@@ -7996,7 +7996,7 @@
             <a:r>
               <a:rPr sz="1150" b="0">
                 <a:solidFill>
-                  <a:srgbClr val="CBD5E1"/>
+                  <a:srgbClr val="33455C"/>
                 </a:solidFill>
                 <a:latin typeface="Segoe UI"/>
               </a:rPr>
@@ -8036,7 +8036,7 @@
             <a:r>
               <a:rPr sz="1300" b="0">
                 <a:solidFill>
-                  <a:srgbClr val="22E88A"/>
+                  <a:srgbClr val="0A7A52"/>
                 </a:solidFill>
                 <a:latin typeface="Segoe UI Semibold"/>
               </a:rPr>
@@ -8077,7 +8077,7 @@
             <a:r>
               <a:rPr sz="1150" b="0">
                 <a:solidFill>
-                  <a:srgbClr val="CBD5E1"/>
+                  <a:srgbClr val="33455C"/>
                 </a:solidFill>
                 <a:latin typeface="Segoe UI"/>
               </a:rPr>
@@ -8095,7 +8095,7 @@
             <a:r>
               <a:rPr sz="1150" b="0">
                 <a:solidFill>
-                  <a:srgbClr val="CBD5E1"/>
+                  <a:srgbClr val="33455C"/>
                 </a:solidFill>
                 <a:latin typeface="Segoe UI"/>
               </a:rPr>
@@ -8113,7 +8113,7 @@
             <a:r>
               <a:rPr sz="1150" b="0">
                 <a:solidFill>
-                  <a:srgbClr val="CBD5E1"/>
+                  <a:srgbClr val="33455C"/>
                 </a:solidFill>
                 <a:latin typeface="Segoe UI"/>
               </a:rPr>
@@ -8165,7 +8165,7 @@
     <p:bg>
       <p:bgPr>
         <a:solidFill>
-          <a:srgbClr val="0E1626"/>
+          <a:srgbClr val="FFFFFF"/>
         </a:solidFill>
         <a:effectLst/>
       </p:bgPr>
@@ -8207,7 +8207,7 @@
             </a:avLst>
           </a:prstGeom>
           <a:solidFill>
-            <a:srgbClr val="16213A"/>
+            <a:srgbClr val="F1F5F9"/>
           </a:solidFill>
           <a:ln>
             <a:noFill/>
@@ -8251,7 +8251,7 @@
             </a:avLst>
           </a:prstGeom>
           <a:solidFill>
-            <a:srgbClr val="16213A"/>
+            <a:srgbClr val="F1F5F9"/>
           </a:solidFill>
           <a:ln>
             <a:noFill/>
@@ -8304,7 +8304,7 @@
             <a:r>
               <a:rPr sz="1000" b="1">
                 <a:solidFill>
-                  <a:srgbClr val="93A7BD"/>
+                  <a:srgbClr val="5A6B80"/>
                 </a:solidFill>
                 <a:latin typeface="Segoe UI"/>
               </a:rPr>
@@ -8339,7 +8339,7 @@
             <a:r>
               <a:rPr sz="1000" b="1">
                 <a:solidFill>
-                  <a:srgbClr val="22E88A"/>
+                  <a:srgbClr val="0A7A52"/>
                 </a:solidFill>
                 <a:latin typeface="Segoe UI"/>
               </a:rPr>
@@ -8374,7 +8374,7 @@
             <a:r>
               <a:rPr sz="1000" b="1">
                 <a:solidFill>
-                  <a:srgbClr val="22E88A"/>
+                  <a:srgbClr val="0A7A52"/>
                 </a:solidFill>
                 <a:latin typeface="Segoe UI"/>
               </a:rPr>
@@ -8414,7 +8414,7 @@
             <a:r>
               <a:rPr sz="2700" b="0">
                 <a:solidFill>
-                  <a:srgbClr val="FFFFFF"/>
+                  <a:srgbClr val="0B1220"/>
                 </a:solidFill>
                 <a:latin typeface="Segoe UI Semibold"/>
               </a:rPr>
@@ -8451,7 +8451,7 @@
             <a:r>
               <a:rPr sz="1250">
                 <a:solidFill>
-                  <a:srgbClr val="F1F5F9"/>
+                  <a:srgbClr val="0F1B2D"/>
                 </a:solidFill>
                 <a:latin typeface="Segoe UI Semibold"/>
               </a:rPr>
@@ -8460,7 +8460,7 @@
             <a:r>
               <a:rPr sz="1250" b="1">
                 <a:solidFill>
-                  <a:srgbClr val="60A5FA"/>
+                  <a:srgbClr val="2563EB"/>
                 </a:solidFill>
                 <a:latin typeface="Consolas"/>
                 <a:hlinkClick r:id="rId3"/>
@@ -8470,7 +8470,7 @@
             <a:r>
               <a:rPr sz="1250">
                 <a:solidFill>
-                  <a:srgbClr val="F1F5F9"/>
+                  <a:srgbClr val="0F1B2D"/>
                 </a:solidFill>
                 <a:latin typeface="Segoe UI Semibold"/>
               </a:rPr>
@@ -8479,7 +8479,7 @@
             <a:r>
               <a:rPr sz="1250" b="1">
                 <a:solidFill>
-                  <a:srgbClr val="60A5FA"/>
+                  <a:srgbClr val="2563EB"/>
                 </a:solidFill>
                 <a:latin typeface="Consolas"/>
                 <a:hlinkClick r:id="rId4"/>
@@ -8494,7 +8494,7 @@
             <a:r>
               <a:rPr sz="1100">
                 <a:solidFill>
-                  <a:srgbClr val="CBD5E1"/>
+                  <a:srgbClr val="33455C"/>
                 </a:solidFill>
                 <a:latin typeface="Segoe UI"/>
               </a:rPr>
@@ -8534,7 +8534,7 @@
             <a:r>
               <a:rPr sz="1300" b="0">
                 <a:solidFill>
-                  <a:srgbClr val="60A5FA"/>
+                  <a:srgbClr val="2563EB"/>
                 </a:solidFill>
                 <a:latin typeface="Segoe UI Semibold"/>
               </a:rPr>
@@ -8575,7 +8575,7 @@
             <a:r>
               <a:rPr sz="1150" b="0">
                 <a:solidFill>
-                  <a:srgbClr val="CBD5E1"/>
+                  <a:srgbClr val="33455C"/>
                 </a:solidFill>
                 <a:latin typeface="Segoe UI"/>
               </a:rPr>
@@ -8593,7 +8593,7 @@
             <a:r>
               <a:rPr sz="1150" b="0">
                 <a:solidFill>
-                  <a:srgbClr val="CBD5E1"/>
+                  <a:srgbClr val="33455C"/>
                 </a:solidFill>
                 <a:latin typeface="Segoe UI"/>
               </a:rPr>
@@ -8611,7 +8611,7 @@
             <a:r>
               <a:rPr sz="1150" b="0">
                 <a:solidFill>
-                  <a:srgbClr val="CBD5E1"/>
+                  <a:srgbClr val="33455C"/>
                 </a:solidFill>
                 <a:latin typeface="Segoe UI"/>
               </a:rPr>
@@ -8651,7 +8651,7 @@
             <a:r>
               <a:rPr sz="1300" b="0">
                 <a:solidFill>
-                  <a:srgbClr val="60A5FA"/>
+                  <a:srgbClr val="2563EB"/>
                 </a:solidFill>
                 <a:latin typeface="Segoe UI Semibold"/>
               </a:rPr>
@@ -8692,7 +8692,7 @@
             <a:r>
               <a:rPr sz="1150" b="0">
                 <a:solidFill>
-                  <a:srgbClr val="CBD5E1"/>
+                  <a:srgbClr val="33455C"/>
                 </a:solidFill>
                 <a:latin typeface="Segoe UI"/>
               </a:rPr>
@@ -8710,7 +8710,7 @@
             <a:r>
               <a:rPr sz="1150" b="0">
                 <a:solidFill>
-                  <a:srgbClr val="CBD5E1"/>
+                  <a:srgbClr val="33455C"/>
                 </a:solidFill>
                 <a:latin typeface="Segoe UI"/>
               </a:rPr>
@@ -8728,7 +8728,7 @@
             <a:r>
               <a:rPr sz="1150" b="0">
                 <a:solidFill>
-                  <a:srgbClr val="CBD5E1"/>
+                  <a:srgbClr val="33455C"/>
                 </a:solidFill>
                 <a:latin typeface="Segoe UI"/>
               </a:rPr>
@@ -8768,7 +8768,7 @@
             <a:r>
               <a:rPr sz="1300" b="0">
                 <a:solidFill>
-                  <a:srgbClr val="22E88A"/>
+                  <a:srgbClr val="0A7A52"/>
                 </a:solidFill>
                 <a:latin typeface="Segoe UI Semibold"/>
               </a:rPr>
@@ -8832,7 +8832,7 @@
             <a:r>
               <a:rPr sz="1150" b="0">
                 <a:solidFill>
-                  <a:srgbClr val="F1F5F9"/>
+                  <a:srgbClr val="0F1B2D"/>
                 </a:solidFill>
                 <a:latin typeface="Segoe UI Semibold"/>
               </a:rPr>
@@ -8849,7 +8849,7 @@
             <a:r>
               <a:rPr sz="1050" b="0">
                 <a:solidFill>
-                  <a:srgbClr val="93A7BD"/>
+                  <a:srgbClr val="5A6B80"/>
                 </a:solidFill>
                 <a:latin typeface="Segoe UI"/>
               </a:rPr>
@@ -8877,7 +8877,7 @@
     <p:bg>
       <p:bgPr>
         <a:solidFill>
-          <a:srgbClr val="0E1626"/>
+          <a:srgbClr val="FFFFFF"/>
         </a:solidFill>
         <a:effectLst/>
       </p:bgPr>
@@ -8913,7 +8913,7 @@
             </a:avLst>
           </a:prstGeom>
           <a:solidFill>
-            <a:srgbClr val="16213A"/>
+            <a:srgbClr val="F1F5F9"/>
           </a:solidFill>
           <a:ln>
             <a:noFill/>
@@ -8957,7 +8957,7 @@
             </a:avLst>
           </a:prstGeom>
           <a:solidFill>
-            <a:srgbClr val="1B2845"/>
+            <a:srgbClr val="E8EFF7"/>
           </a:solidFill>
           <a:ln>
             <a:noFill/>
@@ -9010,7 +9010,7 @@
             <a:r>
               <a:rPr sz="1000" b="1">
                 <a:solidFill>
-                  <a:srgbClr val="93A7BD"/>
+                  <a:srgbClr val="5A6B80"/>
                 </a:solidFill>
                 <a:latin typeface="Segoe UI"/>
               </a:rPr>
@@ -9045,7 +9045,7 @@
             <a:r>
               <a:rPr sz="1000" b="1">
                 <a:solidFill>
-                  <a:srgbClr val="22E88A"/>
+                  <a:srgbClr val="0A7A52"/>
                 </a:solidFill>
                 <a:latin typeface="Segoe UI"/>
               </a:rPr>
@@ -9080,7 +9080,7 @@
             <a:r>
               <a:rPr sz="1000" b="1">
                 <a:solidFill>
-                  <a:srgbClr val="22E88A"/>
+                  <a:srgbClr val="0A7A52"/>
                 </a:solidFill>
                 <a:latin typeface="Segoe UI"/>
               </a:rPr>
@@ -9120,7 +9120,7 @@
             <a:r>
               <a:rPr sz="2700" b="0">
                 <a:solidFill>
-                  <a:srgbClr val="FFFFFF"/>
+                  <a:srgbClr val="0B1220"/>
                 </a:solidFill>
                 <a:latin typeface="Segoe UI Semibold"/>
               </a:rPr>
@@ -9160,7 +9160,7 @@
             <a:r>
               <a:rPr sz="1150" b="1">
                 <a:solidFill>
-                  <a:srgbClr val="CBD5E1"/>
+                  <a:srgbClr val="33455C"/>
                 </a:solidFill>
                 <a:latin typeface="Segoe UI"/>
               </a:rPr>
@@ -9200,7 +9200,7 @@
             <a:r>
               <a:rPr sz="1100" b="0">
                 <a:solidFill>
-                  <a:srgbClr val="22E88A"/>
+                  <a:srgbClr val="0A7A52"/>
                 </a:solidFill>
                 <a:latin typeface="Consolas"/>
               </a:rPr>
@@ -9217,7 +9217,7 @@
             <a:r>
               <a:rPr sz="1100" b="0">
                 <a:solidFill>
-                  <a:srgbClr val="22E88A"/>
+                  <a:srgbClr val="0A7A52"/>
                 </a:solidFill>
                 <a:latin typeface="Consolas"/>
               </a:rPr>
@@ -9234,7 +9234,7 @@
             <a:r>
               <a:rPr sz="1100" b="0">
                 <a:solidFill>
-                  <a:srgbClr val="22E88A"/>
+                  <a:srgbClr val="0A7A52"/>
                 </a:solidFill>
                 <a:latin typeface="Consolas"/>
               </a:rPr>
@@ -9251,7 +9251,7 @@
             <a:r>
               <a:rPr sz="1100" b="0">
                 <a:solidFill>
-                  <a:srgbClr val="22E88A"/>
+                  <a:srgbClr val="0A7A52"/>
                 </a:solidFill>
                 <a:latin typeface="Consolas"/>
               </a:rPr>
@@ -9268,7 +9268,7 @@
             <a:r>
               <a:rPr sz="1000" b="0">
                 <a:solidFill>
-                  <a:srgbClr val="93A7BD"/>
+                  <a:srgbClr val="5A6B80"/>
                 </a:solidFill>
                 <a:latin typeface="Consolas"/>
               </a:rPr>
@@ -9285,7 +9285,7 @@
             <a:r>
               <a:rPr sz="1000" b="0">
                 <a:solidFill>
-                  <a:srgbClr val="93A7BD"/>
+                  <a:srgbClr val="5A6B80"/>
                 </a:solidFill>
                 <a:latin typeface="Consolas"/>
               </a:rPr>
@@ -9325,7 +9325,7 @@
             <a:r>
               <a:rPr sz="1300" b="0">
                 <a:solidFill>
-                  <a:srgbClr val="FFFFFF"/>
+                  <a:srgbClr val="0B1220"/>
                 </a:solidFill>
                 <a:latin typeface="Segoe UI Semibold"/>
               </a:rPr>
@@ -9366,7 +9366,7 @@
             <a:r>
               <a:rPr sz="1150" b="0">
                 <a:solidFill>
-                  <a:srgbClr val="CBD5E1"/>
+                  <a:srgbClr val="33455C"/>
                 </a:solidFill>
                 <a:latin typeface="Segoe UI"/>
               </a:rPr>
@@ -9384,7 +9384,7 @@
             <a:r>
               <a:rPr sz="1150" b="0">
                 <a:solidFill>
-                  <a:srgbClr val="CBD5E1"/>
+                  <a:srgbClr val="33455C"/>
                 </a:solidFill>
                 <a:latin typeface="Segoe UI"/>
               </a:rPr>
@@ -9402,7 +9402,7 @@
             <a:r>
               <a:rPr sz="1150" b="0">
                 <a:solidFill>
-                  <a:srgbClr val="CBD5E1"/>
+                  <a:srgbClr val="33455C"/>
                 </a:solidFill>
                 <a:latin typeface="Segoe UI"/>
               </a:rPr>
@@ -9420,7 +9420,7 @@
             <a:r>
               <a:rPr sz="1150" b="0">
                 <a:solidFill>
-                  <a:srgbClr val="CBD5E1"/>
+                  <a:srgbClr val="33455C"/>
                 </a:solidFill>
                 <a:latin typeface="Segoe UI"/>
               </a:rPr>
@@ -9484,7 +9484,7 @@
             <a:r>
               <a:rPr sz="1250" b="0">
                 <a:solidFill>
-                  <a:srgbClr val="F59E0B"/>
+                  <a:srgbClr val="C2410C"/>
                 </a:solidFill>
                 <a:latin typeface="Segoe UI Semibold"/>
               </a:rPr>
@@ -9501,7 +9501,7 @@
             <a:r>
               <a:rPr sz="1150" b="0">
                 <a:solidFill>
-                  <a:srgbClr val="CBD5E1"/>
+                  <a:srgbClr val="33455C"/>
                 </a:solidFill>
                 <a:latin typeface="Segoe UI"/>
               </a:rPr>
@@ -9518,7 +9518,7 @@
             <a:r>
               <a:rPr sz="1150" b="0">
                 <a:solidFill>
-                  <a:srgbClr val="93A7BD"/>
+                  <a:srgbClr val="5A6B80"/>
                 </a:solidFill>
                 <a:latin typeface="Segoe UI"/>
               </a:rPr>
@@ -9535,7 +9535,7 @@
             <a:r>
               <a:rPr sz="1050" b="0">
                 <a:solidFill>
-                  <a:srgbClr val="60A5FA"/>
+                  <a:srgbClr val="2563EB"/>
                 </a:solidFill>
                 <a:latin typeface="Segoe UI"/>
               </a:rPr>
@@ -9592,10 +9592,10 @@
         <a:srgbClr val="F79646"/>
       </a:accent6>
       <a:hlink>
-        <a:srgbClr val="60A5FA"/>
+        <a:srgbClr val="2563EB"/>
       </a:hlink>
       <a:folHlink>
-        <a:srgbClr val="93A7BD"/>
+        <a:srgbClr val="5A6B80"/>
       </a:folHlink>
     </a:clrScheme>
     <a:fontScheme name="Office">
